--- a/Week_3/Coding_rubric/Image.pptx
+++ b/Week_3/Coding_rubric/Image.pptx
@@ -210,7 +210,7 @@
           <a:p>
             <a:fld id="{4A1EB44C-379D-C94E-94D8-D7A2C0AA4B9E}" type="datetimeFigureOut">
               <a:rPr lang="en-AU" smtClean="0"/>
-              <a:t>1/8/2025</a:t>
+              <a:t>11/8/2025</a:t>
             </a:fld>
             <a:endParaRPr lang="en-AU"/>
           </a:p>
@@ -711,7 +711,7 @@
           <a:p>
             <a:fld id="{8FF4EB0D-93A4-CD4A-A171-92B167C22DDB}" type="datetimeFigureOut">
               <a:rPr lang="en-AU" smtClean="0"/>
-              <a:t>1/8/2025</a:t>
+              <a:t>11/8/2025</a:t>
             </a:fld>
             <a:endParaRPr lang="en-AU"/>
           </a:p>
@@ -911,7 +911,7 @@
           <a:p>
             <a:fld id="{8FF4EB0D-93A4-CD4A-A171-92B167C22DDB}" type="datetimeFigureOut">
               <a:rPr lang="en-AU" smtClean="0"/>
-              <a:t>1/8/2025</a:t>
+              <a:t>11/8/2025</a:t>
             </a:fld>
             <a:endParaRPr lang="en-AU"/>
           </a:p>
@@ -1121,7 +1121,7 @@
           <a:p>
             <a:fld id="{8FF4EB0D-93A4-CD4A-A171-92B167C22DDB}" type="datetimeFigureOut">
               <a:rPr lang="en-AU" smtClean="0"/>
-              <a:t>1/8/2025</a:t>
+              <a:t>11/8/2025</a:t>
             </a:fld>
             <a:endParaRPr lang="en-AU"/>
           </a:p>
@@ -1321,7 +1321,7 @@
           <a:p>
             <a:fld id="{8FF4EB0D-93A4-CD4A-A171-92B167C22DDB}" type="datetimeFigureOut">
               <a:rPr lang="en-AU" smtClean="0"/>
-              <a:t>1/8/2025</a:t>
+              <a:t>11/8/2025</a:t>
             </a:fld>
             <a:endParaRPr lang="en-AU"/>
           </a:p>
@@ -1597,7 +1597,7 @@
           <a:p>
             <a:fld id="{8FF4EB0D-93A4-CD4A-A171-92B167C22DDB}" type="datetimeFigureOut">
               <a:rPr lang="en-AU" smtClean="0"/>
-              <a:t>1/8/2025</a:t>
+              <a:t>11/8/2025</a:t>
             </a:fld>
             <a:endParaRPr lang="en-AU"/>
           </a:p>
@@ -1865,7 +1865,7 @@
           <a:p>
             <a:fld id="{8FF4EB0D-93A4-CD4A-A171-92B167C22DDB}" type="datetimeFigureOut">
               <a:rPr lang="en-AU" smtClean="0"/>
-              <a:t>1/8/2025</a:t>
+              <a:t>11/8/2025</a:t>
             </a:fld>
             <a:endParaRPr lang="en-AU"/>
           </a:p>
@@ -2280,7 +2280,7 @@
           <a:p>
             <a:fld id="{8FF4EB0D-93A4-CD4A-A171-92B167C22DDB}" type="datetimeFigureOut">
               <a:rPr lang="en-AU" smtClean="0"/>
-              <a:t>1/8/2025</a:t>
+              <a:t>11/8/2025</a:t>
             </a:fld>
             <a:endParaRPr lang="en-AU"/>
           </a:p>
@@ -2422,7 +2422,7 @@
           <a:p>
             <a:fld id="{8FF4EB0D-93A4-CD4A-A171-92B167C22DDB}" type="datetimeFigureOut">
               <a:rPr lang="en-AU" smtClean="0"/>
-              <a:t>1/8/2025</a:t>
+              <a:t>11/8/2025</a:t>
             </a:fld>
             <a:endParaRPr lang="en-AU"/>
           </a:p>
@@ -2535,7 +2535,7 @@
           <a:p>
             <a:fld id="{8FF4EB0D-93A4-CD4A-A171-92B167C22DDB}" type="datetimeFigureOut">
               <a:rPr lang="en-AU" smtClean="0"/>
-              <a:t>1/8/2025</a:t>
+              <a:t>11/8/2025</a:t>
             </a:fld>
             <a:endParaRPr lang="en-AU"/>
           </a:p>
@@ -2848,7 +2848,7 @@
           <a:p>
             <a:fld id="{8FF4EB0D-93A4-CD4A-A171-92B167C22DDB}" type="datetimeFigureOut">
               <a:rPr lang="en-AU" smtClean="0"/>
-              <a:t>1/8/2025</a:t>
+              <a:t>11/8/2025</a:t>
             </a:fld>
             <a:endParaRPr lang="en-AU"/>
           </a:p>
@@ -3137,7 +3137,7 @@
           <a:p>
             <a:fld id="{8FF4EB0D-93A4-CD4A-A171-92B167C22DDB}" type="datetimeFigureOut">
               <a:rPr lang="en-AU" smtClean="0"/>
-              <a:t>1/8/2025</a:t>
+              <a:t>11/8/2025</a:t>
             </a:fld>
             <a:endParaRPr lang="en-AU"/>
           </a:p>
@@ -3380,7 +3380,7 @@
           <a:p>
             <a:fld id="{8FF4EB0D-93A4-CD4A-A171-92B167C22DDB}" type="datetimeFigureOut">
               <a:rPr lang="en-AU" smtClean="0"/>
-              <a:t>1/8/2025</a:t>
+              <a:t>11/8/2025</a:t>
             </a:fld>
             <a:endParaRPr lang="en-AU"/>
           </a:p>
@@ -4888,12 +4888,42 @@
           <a:chExt cx="0" cy="0"/>
         </a:xfrm>
       </p:grpSpPr>
-      <p:sp>
-        <p:nvSpPr>
-          <p:cNvPr id="32" name="TextBox 31">
-            <a:extLst>
-              <a:ext uri="{FF2B5EF4-FFF2-40B4-BE49-F238E27FC236}">
-                <a16:creationId xmlns:a16="http://schemas.microsoft.com/office/drawing/2014/main" id="{17529B0D-C7D1-BAFA-98EA-78060970E122}"/>
+      <p:pic>
+        <p:nvPicPr>
+          <p:cNvPr id="8" name="Picture 7" descr="A screenshot of a graph&#10;&#10;Description automatically generated">
+            <a:extLst>
+              <a:ext uri="{FF2B5EF4-FFF2-40B4-BE49-F238E27FC236}">
+                <a16:creationId xmlns:a16="http://schemas.microsoft.com/office/drawing/2014/main" id="{B65CD15B-7E6D-5E11-8A46-D51800E9A340}"/>
+              </a:ext>
+            </a:extLst>
+          </p:cNvPr>
+          <p:cNvPicPr>
+            <a:picLocks noChangeAspect="1"/>
+          </p:cNvPicPr>
+          <p:nvPr/>
+        </p:nvPicPr>
+        <p:blipFill>
+          <a:blip r:embed="rId2"/>
+          <a:stretch>
+            <a:fillRect/>
+          </a:stretch>
+        </p:blipFill>
+        <p:spPr>
+          <a:xfrm>
+            <a:off x="3653227" y="0"/>
+            <a:ext cx="3287972" cy="6858000"/>
+          </a:xfrm>
+          <a:prstGeom prst="rect">
+            <a:avLst/>
+          </a:prstGeom>
+        </p:spPr>
+      </p:pic>
+      <p:sp>
+        <p:nvSpPr>
+          <p:cNvPr id="9" name="TextBox 8">
+            <a:extLst>
+              <a:ext uri="{FF2B5EF4-FFF2-40B4-BE49-F238E27FC236}">
+                <a16:creationId xmlns:a16="http://schemas.microsoft.com/office/drawing/2014/main" id="{7DBD48A4-570D-76F7-9283-73C8890EE233}"/>
               </a:ext>
             </a:extLst>
           </p:cNvPr>
@@ -4902,8 +4932,8 @@
         </p:nvSpPr>
         <p:spPr>
           <a:xfrm>
-            <a:off x="7241059" y="914396"/>
-            <a:ext cx="3348680" cy="646331"/>
+            <a:off x="7209528" y="1681650"/>
+            <a:ext cx="3348680" cy="369332"/>
           </a:xfrm>
           <a:prstGeom prst="rect">
             <a:avLst/>
@@ -4918,23 +4948,17 @@
           <a:p>
             <a:r>
               <a:rPr lang="en-AU" b="1" dirty="0"/>
-              <a:t>The data problem</a:t>
-            </a:r>
-          </a:p>
-          <a:p>
-            <a:r>
-              <a:rPr lang="en-AU" b="1" dirty="0"/>
-              <a:t>&amp; what you did to it</a:t>
-            </a:r>
-          </a:p>
-        </p:txBody>
-      </p:sp>
-      <p:sp>
-        <p:nvSpPr>
-          <p:cNvPr id="33" name="TextBox 32">
-            <a:extLst>
-              <a:ext uri="{FF2B5EF4-FFF2-40B4-BE49-F238E27FC236}">
-                <a16:creationId xmlns:a16="http://schemas.microsoft.com/office/drawing/2014/main" id="{850FE101-E9A1-C5ED-7698-F374819F4276}"/>
+              <a:t>Step 1. ID the problem</a:t>
+            </a:r>
+          </a:p>
+        </p:txBody>
+      </p:sp>
+      <p:sp>
+        <p:nvSpPr>
+          <p:cNvPr id="10" name="TextBox 9">
+            <a:extLst>
+              <a:ext uri="{FF2B5EF4-FFF2-40B4-BE49-F238E27FC236}">
+                <a16:creationId xmlns:a16="http://schemas.microsoft.com/office/drawing/2014/main" id="{365C57E4-D3F3-ABE3-3C9D-DFC77892CF5D}"/>
               </a:ext>
             </a:extLst>
           </p:cNvPr>
@@ -4943,8 +4967,8 @@
         </p:nvSpPr>
         <p:spPr>
           <a:xfrm>
-            <a:off x="7257535" y="3244334"/>
-            <a:ext cx="2166940" cy="369332"/>
+            <a:off x="7257535" y="3559644"/>
+            <a:ext cx="3419462" cy="369332"/>
           </a:xfrm>
           <a:prstGeom prst="rect">
             <a:avLst/>
@@ -4959,17 +4983,17 @@
           <a:p>
             <a:r>
               <a:rPr lang="en-AU" b="1" dirty="0"/>
-              <a:t>The code you used </a:t>
-            </a:r>
-          </a:p>
-        </p:txBody>
-      </p:sp>
-      <p:sp>
-        <p:nvSpPr>
-          <p:cNvPr id="34" name="TextBox 33">
-            <a:extLst>
-              <a:ext uri="{FF2B5EF4-FFF2-40B4-BE49-F238E27FC236}">
-                <a16:creationId xmlns:a16="http://schemas.microsoft.com/office/drawing/2014/main" id="{69710571-C17A-4CC6-1132-E231B326A760}"/>
+              <a:t>Step 2. Solution to the problem</a:t>
+            </a:r>
+          </a:p>
+        </p:txBody>
+      </p:sp>
+      <p:sp>
+        <p:nvSpPr>
+          <p:cNvPr id="11" name="TextBox 10">
+            <a:extLst>
+              <a:ext uri="{FF2B5EF4-FFF2-40B4-BE49-F238E27FC236}">
+                <a16:creationId xmlns:a16="http://schemas.microsoft.com/office/drawing/2014/main" id="{AC327239-CFB0-2F52-323B-79F05FC035E9}"/>
               </a:ext>
             </a:extLst>
           </p:cNvPr>
@@ -4978,8 +5002,8 @@
         </p:nvSpPr>
         <p:spPr>
           <a:xfrm>
-            <a:off x="7224583" y="5558481"/>
-            <a:ext cx="2382383" cy="369332"/>
+            <a:off x="7214073" y="5264194"/>
+            <a:ext cx="3053015" cy="646331"/>
           </a:xfrm>
           <a:prstGeom prst="rect">
             <a:avLst/>
@@ -4994,17 +5018,23 @@
           <a:p>
             <a:r>
               <a:rPr lang="en-AU" b="1" dirty="0"/>
-              <a:t>The final comparison</a:t>
-            </a:r>
-          </a:p>
-        </p:txBody>
-      </p:sp>
-      <p:sp>
-        <p:nvSpPr>
-          <p:cNvPr id="35" name="Right Bracket 34">
-            <a:extLst>
-              <a:ext uri="{FF2B5EF4-FFF2-40B4-BE49-F238E27FC236}">
-                <a16:creationId xmlns:a16="http://schemas.microsoft.com/office/drawing/2014/main" id="{93948687-99C0-C508-318C-724FDA69529E}"/>
+              <a:t>Step 3. Check that solution </a:t>
+            </a:r>
+          </a:p>
+          <a:p>
+            <a:r>
+              <a:rPr lang="en-AU" b="1" dirty="0"/>
+              <a:t>                 resolved problem</a:t>
+            </a:r>
+          </a:p>
+        </p:txBody>
+      </p:sp>
+      <p:sp>
+        <p:nvSpPr>
+          <p:cNvPr id="12" name="Right Bracket 11">
+            <a:extLst>
+              <a:ext uri="{FF2B5EF4-FFF2-40B4-BE49-F238E27FC236}">
+                <a16:creationId xmlns:a16="http://schemas.microsoft.com/office/drawing/2014/main" id="{F1E72A10-DCE0-64BE-AD02-02CD3ACF95E3}"/>
               </a:ext>
             </a:extLst>
           </p:cNvPr>
@@ -5013,7 +5043,7 @@
         </p:nvSpPr>
         <p:spPr>
           <a:xfrm>
-            <a:off x="6956854" y="160637"/>
+            <a:off x="6883282" y="812277"/>
             <a:ext cx="284206" cy="2162433"/>
           </a:xfrm>
           <a:prstGeom prst="rightBracket">
@@ -5050,10 +5080,10 @@
       </p:sp>
       <p:sp>
         <p:nvSpPr>
-          <p:cNvPr id="36" name="Right Bracket 35">
-            <a:extLst>
-              <a:ext uri="{FF2B5EF4-FFF2-40B4-BE49-F238E27FC236}">
-                <a16:creationId xmlns:a16="http://schemas.microsoft.com/office/drawing/2014/main" id="{661A5229-1555-FD98-D3BC-785184E09015}"/>
+          <p:cNvPr id="13" name="Right Bracket 12">
+            <a:extLst>
+              <a:ext uri="{FF2B5EF4-FFF2-40B4-BE49-F238E27FC236}">
+                <a16:creationId xmlns:a16="http://schemas.microsoft.com/office/drawing/2014/main" id="{44E90E7E-4B40-13AE-077E-00FD2ED2D63B}"/>
               </a:ext>
             </a:extLst>
           </p:cNvPr>
@@ -5062,8 +5092,8 @@
         </p:nvSpPr>
         <p:spPr>
           <a:xfrm>
-            <a:off x="6948616" y="2542294"/>
-            <a:ext cx="284206" cy="1787135"/>
+            <a:off x="6948616" y="3342288"/>
+            <a:ext cx="284206" cy="767255"/>
           </a:xfrm>
           <a:prstGeom prst="rightBracket">
             <a:avLst/>
@@ -5099,10 +5129,10 @@
       </p:sp>
       <p:sp>
         <p:nvSpPr>
-          <p:cNvPr id="37" name="Right Bracket 36">
-            <a:extLst>
-              <a:ext uri="{FF2B5EF4-FFF2-40B4-BE49-F238E27FC236}">
-                <a16:creationId xmlns:a16="http://schemas.microsoft.com/office/drawing/2014/main" id="{840D3425-22A0-A857-281D-BE4F6395D497}"/>
+          <p:cNvPr id="14" name="Right Bracket 13">
+            <a:extLst>
+              <a:ext uri="{FF2B5EF4-FFF2-40B4-BE49-F238E27FC236}">
+                <a16:creationId xmlns:a16="http://schemas.microsoft.com/office/drawing/2014/main" id="{F522B9C5-25E4-DDEF-871F-3CEDC904ECD7}"/>
               </a:ext>
             </a:extLst>
           </p:cNvPr>
@@ -5111,8 +5141,8 @@
         </p:nvSpPr>
         <p:spPr>
           <a:xfrm>
-            <a:off x="6903305" y="5158110"/>
-            <a:ext cx="284206" cy="1109670"/>
+            <a:off x="6903305" y="4277713"/>
+            <a:ext cx="284206" cy="2375335"/>
           </a:xfrm>
           <a:prstGeom prst="rightBracket">
             <a:avLst/>
@@ -5146,36 +5176,6 @@
           </a:p>
         </p:txBody>
       </p:sp>
-      <p:pic>
-        <p:nvPicPr>
-          <p:cNvPr id="38" name="Picture 37">
-            <a:extLst>
-              <a:ext uri="{FF2B5EF4-FFF2-40B4-BE49-F238E27FC236}">
-                <a16:creationId xmlns:a16="http://schemas.microsoft.com/office/drawing/2014/main" id="{47457B0C-532D-46A0-C749-C8C1101F0953}"/>
-              </a:ext>
-            </a:extLst>
-          </p:cNvPr>
-          <p:cNvPicPr>
-            <a:picLocks noChangeAspect="1"/>
-          </p:cNvPicPr>
-          <p:nvPr/>
-        </p:nvPicPr>
-        <p:blipFill>
-          <a:blip r:embed="rId2"/>
-          <a:stretch>
-            <a:fillRect/>
-          </a:stretch>
-        </p:blipFill>
-        <p:spPr>
-          <a:xfrm>
-            <a:off x="3023788" y="0"/>
-            <a:ext cx="3920207" cy="6858000"/>
-          </a:xfrm>
-          <a:prstGeom prst="rect">
-            <a:avLst/>
-          </a:prstGeom>
-        </p:spPr>
-      </p:pic>
     </p:spTree>
     <p:extLst>
       <p:ext uri="{BB962C8B-B14F-4D97-AF65-F5344CB8AC3E}">
